--- a/worksheet/UPI_Fraud_Awareness_Assistant_Team_Worksheet_FILLED.pptx
+++ b/worksheet/UPI_Fraud_Awareness_Assistant_Team_Worksheet_FILLED.pptx
@@ -3178,7 +3178,7 @@
                 <a:ea typeface="Arial" pitchFamily="34" charset="-122"/>
                 <a:cs typeface="Arial" pitchFamily="34" charset="-120"/>
               </a:rPr>
-              <a:t>claude.ai/code/artifact/044b420b-77c5-4a71-a300-e1faa83fdfbc</a:t>
+              <a:t>upi-suraksha-mitra.onrender.com</a:t>
             </a:r>
             <a:endParaRPr lang="en-US" sz="1100" dirty="0"/>
           </a:p>
